--- a/시스템 기획/아웃배틀 옵션/자료/게임 플레이.pptx
+++ b/시스템 기획/아웃배틀 옵션/자료/게임 플레이.pptx
@@ -259,7 +259,7 @@
           <a:p>
             <a:fld id="{DA2F05AD-DC08-4F6C-9164-0EAD3A5E84DB}" type="datetimeFigureOut">
               <a:rPr lang="ko-KR" altLang="en-US" smtClean="0"/>
-              <a:t>2025-10-10</a:t>
+              <a:t>2025-10-16</a:t>
             </a:fld>
             <a:endParaRPr lang="ko-KR" altLang="en-US"/>
           </a:p>
@@ -457,7 +457,7 @@
           <a:p>
             <a:fld id="{DA2F05AD-DC08-4F6C-9164-0EAD3A5E84DB}" type="datetimeFigureOut">
               <a:rPr lang="ko-KR" altLang="en-US" smtClean="0"/>
-              <a:t>2025-10-10</a:t>
+              <a:t>2025-10-16</a:t>
             </a:fld>
             <a:endParaRPr lang="ko-KR" altLang="en-US"/>
           </a:p>
@@ -665,7 +665,7 @@
           <a:p>
             <a:fld id="{DA2F05AD-DC08-4F6C-9164-0EAD3A5E84DB}" type="datetimeFigureOut">
               <a:rPr lang="ko-KR" altLang="en-US" smtClean="0"/>
-              <a:t>2025-10-10</a:t>
+              <a:t>2025-10-16</a:t>
             </a:fld>
             <a:endParaRPr lang="ko-KR" altLang="en-US"/>
           </a:p>
@@ -863,7 +863,7 @@
           <a:p>
             <a:fld id="{DA2F05AD-DC08-4F6C-9164-0EAD3A5E84DB}" type="datetimeFigureOut">
               <a:rPr lang="ko-KR" altLang="en-US" smtClean="0"/>
-              <a:t>2025-10-10</a:t>
+              <a:t>2025-10-16</a:t>
             </a:fld>
             <a:endParaRPr lang="ko-KR" altLang="en-US"/>
           </a:p>
@@ -1138,7 +1138,7 @@
           <a:p>
             <a:fld id="{DA2F05AD-DC08-4F6C-9164-0EAD3A5E84DB}" type="datetimeFigureOut">
               <a:rPr lang="ko-KR" altLang="en-US" smtClean="0"/>
-              <a:t>2025-10-10</a:t>
+              <a:t>2025-10-16</a:t>
             </a:fld>
             <a:endParaRPr lang="ko-KR" altLang="en-US"/>
           </a:p>
@@ -1403,7 +1403,7 @@
           <a:p>
             <a:fld id="{DA2F05AD-DC08-4F6C-9164-0EAD3A5E84DB}" type="datetimeFigureOut">
               <a:rPr lang="ko-KR" altLang="en-US" smtClean="0"/>
-              <a:t>2025-10-10</a:t>
+              <a:t>2025-10-16</a:t>
             </a:fld>
             <a:endParaRPr lang="ko-KR" altLang="en-US"/>
           </a:p>
@@ -1815,7 +1815,7 @@
           <a:p>
             <a:fld id="{DA2F05AD-DC08-4F6C-9164-0EAD3A5E84DB}" type="datetimeFigureOut">
               <a:rPr lang="ko-KR" altLang="en-US" smtClean="0"/>
-              <a:t>2025-10-10</a:t>
+              <a:t>2025-10-16</a:t>
             </a:fld>
             <a:endParaRPr lang="ko-KR" altLang="en-US"/>
           </a:p>
@@ -1956,7 +1956,7 @@
           <a:p>
             <a:fld id="{DA2F05AD-DC08-4F6C-9164-0EAD3A5E84DB}" type="datetimeFigureOut">
               <a:rPr lang="ko-KR" altLang="en-US" smtClean="0"/>
-              <a:t>2025-10-10</a:t>
+              <a:t>2025-10-16</a:t>
             </a:fld>
             <a:endParaRPr lang="ko-KR" altLang="en-US"/>
           </a:p>
@@ -2069,7 +2069,7 @@
           <a:p>
             <a:fld id="{DA2F05AD-DC08-4F6C-9164-0EAD3A5E84DB}" type="datetimeFigureOut">
               <a:rPr lang="ko-KR" altLang="en-US" smtClean="0"/>
-              <a:t>2025-10-10</a:t>
+              <a:t>2025-10-16</a:t>
             </a:fld>
             <a:endParaRPr lang="ko-KR" altLang="en-US"/>
           </a:p>
@@ -2380,7 +2380,7 @@
           <a:p>
             <a:fld id="{DA2F05AD-DC08-4F6C-9164-0EAD3A5E84DB}" type="datetimeFigureOut">
               <a:rPr lang="ko-KR" altLang="en-US" smtClean="0"/>
-              <a:t>2025-10-10</a:t>
+              <a:t>2025-10-16</a:t>
             </a:fld>
             <a:endParaRPr lang="ko-KR" altLang="en-US"/>
           </a:p>
@@ -2668,7 +2668,7 @@
           <a:p>
             <a:fld id="{DA2F05AD-DC08-4F6C-9164-0EAD3A5E84DB}" type="datetimeFigureOut">
               <a:rPr lang="ko-KR" altLang="en-US" smtClean="0"/>
-              <a:t>2025-10-10</a:t>
+              <a:t>2025-10-16</a:t>
             </a:fld>
             <a:endParaRPr lang="ko-KR" altLang="en-US"/>
           </a:p>
@@ -2909,7 +2909,7 @@
           <a:p>
             <a:fld id="{DA2F05AD-DC08-4F6C-9164-0EAD3A5E84DB}" type="datetimeFigureOut">
               <a:rPr lang="ko-KR" altLang="en-US" smtClean="0"/>
-              <a:t>2025-10-10</a:t>
+              <a:t>2025-10-16</a:t>
             </a:fld>
             <a:endParaRPr lang="ko-KR" altLang="en-US"/>
           </a:p>
@@ -3326,109 +3326,6 @@
           <a:chExt cx="0" cy="0"/>
         </a:xfrm>
       </p:grpSpPr>
-      <p:grpSp>
-        <p:nvGrpSpPr>
-          <p:cNvPr id="7" name="그룹 6">
-            <a:extLst>
-              <a:ext uri="{FF2B5EF4-FFF2-40B4-BE49-F238E27FC236}">
-                <a16:creationId xmlns:a16="http://schemas.microsoft.com/office/drawing/2014/main" id="{7E765CB7-0EF7-EFB7-C94C-A5C19DEA86D1}"/>
-              </a:ext>
-            </a:extLst>
-          </p:cNvPr>
-          <p:cNvGrpSpPr/>
-          <p:nvPr/>
-        </p:nvGrpSpPr>
-        <p:grpSpPr>
-          <a:xfrm>
-            <a:off x="2481279" y="1052945"/>
-            <a:ext cx="1625602" cy="629669"/>
-            <a:chOff x="4572000" y="1662545"/>
-            <a:chExt cx="3001818" cy="629669"/>
-          </a:xfrm>
-        </p:grpSpPr>
-        <p:sp>
-          <p:nvSpPr>
-            <p:cNvPr id="6" name="순서도: 처리 5">
-              <a:extLst>
-                <a:ext uri="{FF2B5EF4-FFF2-40B4-BE49-F238E27FC236}">
-                  <a16:creationId xmlns:a16="http://schemas.microsoft.com/office/drawing/2014/main" id="{613011BC-6790-362A-4FDC-AED936A838FA}"/>
-                </a:ext>
-              </a:extLst>
-            </p:cNvPr>
-            <p:cNvSpPr/>
-            <p:nvPr/>
-          </p:nvSpPr>
-          <p:spPr>
-            <a:xfrm>
-              <a:off x="4572000" y="1662545"/>
-              <a:ext cx="3001818" cy="629669"/>
-            </a:xfrm>
-            <a:prstGeom prst="flowChartProcess">
-              <a:avLst/>
-            </a:prstGeom>
-          </p:spPr>
-          <p:style>
-            <a:lnRef idx="2">
-              <a:schemeClr val="accent1">
-                <a:shade val="15000"/>
-              </a:schemeClr>
-            </a:lnRef>
-            <a:fillRef idx="1">
-              <a:schemeClr val="accent1"/>
-            </a:fillRef>
-            <a:effectRef idx="0">
-              <a:schemeClr val="accent1"/>
-            </a:effectRef>
-            <a:fontRef idx="minor">
-              <a:schemeClr val="lt1"/>
-            </a:fontRef>
-          </p:style>
-          <p:txBody>
-            <a:bodyPr rtlCol="0" anchor="ctr"/>
-            <a:lstStyle/>
-            <a:p>
-              <a:pPr algn="ctr"/>
-              <a:endParaRPr lang="ko-KR" altLang="en-US"/>
-            </a:p>
-          </p:txBody>
-        </p:sp>
-        <p:sp>
-          <p:nvSpPr>
-            <p:cNvPr id="5" name="TextBox 4">
-              <a:extLst>
-                <a:ext uri="{FF2B5EF4-FFF2-40B4-BE49-F238E27FC236}">
-                  <a16:creationId xmlns:a16="http://schemas.microsoft.com/office/drawing/2014/main" id="{FA37CC9C-D954-DCDC-6A26-8BC2BB9385BA}"/>
-                </a:ext>
-              </a:extLst>
-            </p:cNvPr>
-            <p:cNvSpPr txBox="1"/>
-            <p:nvPr/>
-          </p:nvSpPr>
-          <p:spPr>
-            <a:xfrm>
-              <a:off x="4723939" y="1792713"/>
-              <a:ext cx="2752436" cy="369332"/>
-            </a:xfrm>
-            <a:prstGeom prst="rect">
-              <a:avLst/>
-            </a:prstGeom>
-            <a:noFill/>
-          </p:spPr>
-          <p:txBody>
-            <a:bodyPr wrap="square" rtlCol="0">
-              <a:spAutoFit/>
-            </a:bodyPr>
-            <a:lstStyle/>
-            <a:p>
-              <a:pPr algn="ctr"/>
-              <a:r>
-                <a:rPr lang="ko-KR" altLang="en-US"/>
-                <a:t>난이도 설정</a:t>
-              </a:r>
-            </a:p>
-          </p:txBody>
-        </p:sp>
-      </p:grpSp>
       <p:pic>
         <p:nvPicPr>
           <p:cNvPr id="15" name="그림 14" descr="Toggle button design: the full run through - Justinmind">
@@ -3456,7 +3353,7 @@
         </p:blipFill>
         <p:spPr bwMode="auto">
           <a:xfrm>
-            <a:off x="4204444" y="4411123"/>
+            <a:off x="5379244" y="2971800"/>
             <a:ext cx="1433512" cy="914400"/>
           </a:xfrm>
           <a:prstGeom prst="rect">
@@ -3487,7 +3384,7 @@
         </p:nvGrpSpPr>
         <p:grpSpPr>
           <a:xfrm>
-            <a:off x="2464800" y="1909468"/>
+            <a:off x="3639600" y="1356834"/>
             <a:ext cx="1625602" cy="629669"/>
             <a:chOff x="4572000" y="1662545"/>
             <a:chExt cx="3001818" cy="629669"/>
@@ -3603,7 +3500,7 @@
         </p:blipFill>
         <p:spPr bwMode="auto">
           <a:xfrm>
-            <a:off x="4425824" y="1954032"/>
+            <a:off x="5600624" y="1401398"/>
             <a:ext cx="3891915" cy="540543"/>
           </a:xfrm>
           <a:prstGeom prst="rect">
@@ -3634,7 +3531,7 @@
         </p:nvGrpSpPr>
         <p:grpSpPr>
           <a:xfrm>
-            <a:off x="2439075" y="4553489"/>
+            <a:off x="3613875" y="3114166"/>
             <a:ext cx="1625602" cy="629669"/>
             <a:chOff x="4572000" y="1662545"/>
             <a:chExt cx="3001818" cy="629669"/>
@@ -3725,10 +3622,10 @@
       </p:grpSp>
       <p:grpSp>
         <p:nvGrpSpPr>
-          <p:cNvPr id="8" name="그룹 7">
-            <a:extLst>
-              <a:ext uri="{FF2B5EF4-FFF2-40B4-BE49-F238E27FC236}">
-                <a16:creationId xmlns:a16="http://schemas.microsoft.com/office/drawing/2014/main" id="{ED4976A3-35C6-503E-1D58-CA71F22DFE0D}"/>
+          <p:cNvPr id="9" name="그룹 8">
+            <a:extLst>
+              <a:ext uri="{FF2B5EF4-FFF2-40B4-BE49-F238E27FC236}">
+                <a16:creationId xmlns:a16="http://schemas.microsoft.com/office/drawing/2014/main" id="{41B3FD36-8CDE-A51E-0790-D143433A5753}"/>
               </a:ext>
             </a:extLst>
           </p:cNvPr>
@@ -3737,141 +3634,7 @@
         </p:nvGrpSpPr>
         <p:grpSpPr>
           <a:xfrm>
-            <a:off x="4230169" y="786709"/>
-            <a:ext cx="2224223" cy="1122309"/>
-            <a:chOff x="8290495" y="1367779"/>
-            <a:chExt cx="2675890" cy="1362075"/>
-          </a:xfrm>
-        </p:grpSpPr>
-        <p:sp>
-          <p:nvSpPr>
-            <p:cNvPr id="4" name="사각형: 둥근 모서리 3">
-              <a:extLst>
-                <a:ext uri="{FF2B5EF4-FFF2-40B4-BE49-F238E27FC236}">
-                  <a16:creationId xmlns:a16="http://schemas.microsoft.com/office/drawing/2014/main" id="{CE4E5411-BA9A-C838-7FD7-3FEF9ECC7107}"/>
-                </a:ext>
-              </a:extLst>
-            </p:cNvPr>
-            <p:cNvSpPr/>
-            <p:nvPr/>
-          </p:nvSpPr>
-          <p:spPr>
-            <a:xfrm>
-              <a:off x="8549031" y="1549413"/>
-              <a:ext cx="2103401" cy="1053438"/>
-            </a:xfrm>
-            <a:prstGeom prst="roundRect">
-              <a:avLst>
-                <a:gd name="adj" fmla="val 31572"/>
-              </a:avLst>
-            </a:prstGeom>
-            <a:solidFill>
-              <a:schemeClr val="bg1">
-                <a:lumMod val="85000"/>
-              </a:schemeClr>
-            </a:solidFill>
-            <a:ln>
-              <a:solidFill>
-                <a:schemeClr val="tx1"/>
-              </a:solidFill>
-            </a:ln>
-          </p:spPr>
-          <p:style>
-            <a:lnRef idx="2">
-              <a:schemeClr val="accent1">
-                <a:shade val="15000"/>
-              </a:schemeClr>
-            </a:lnRef>
-            <a:fillRef idx="1">
-              <a:schemeClr val="accent1"/>
-            </a:fillRef>
-            <a:effectRef idx="0">
-              <a:schemeClr val="accent1"/>
-            </a:effectRef>
-            <a:fontRef idx="minor">
-              <a:schemeClr val="lt1"/>
-            </a:fontRef>
-          </p:style>
-          <p:txBody>
-            <a:bodyPr rtlCol="0" anchor="ctr"/>
-            <a:lstStyle/>
-            <a:p>
-              <a:pPr algn="ctr"/>
-              <a:endParaRPr lang="ko-KR" altLang="en-US"/>
-            </a:p>
-          </p:txBody>
-        </p:sp>
-        <p:pic>
-          <p:nvPicPr>
-            <p:cNvPr id="3" name="그림 2" descr="Prototype an Input Stepper with Formula">
-              <a:extLst>
-                <a:ext uri="{FF2B5EF4-FFF2-40B4-BE49-F238E27FC236}">
-                  <a16:creationId xmlns:a16="http://schemas.microsoft.com/office/drawing/2014/main" id="{CEB535D0-6285-58FF-1928-3AE12B770ECD}"/>
-                </a:ext>
-              </a:extLst>
-            </p:cNvPr>
-            <p:cNvPicPr>
-              <a:picLocks noChangeAspect="1"/>
-            </p:cNvPicPr>
-            <p:nvPr/>
-          </p:nvPicPr>
-          <p:blipFill rotWithShape="1">
-            <a:blip r:embed="rId4" cstate="print">
-              <a:extLst>
-                <a:ext uri="{BEBA8EAE-BF5A-486C-A8C5-ECC9F3942E4B}">
-                  <a14:imgProps xmlns:a14="http://schemas.microsoft.com/office/drawing/2010/main">
-                    <a14:imgLayer r:embed="rId5">
-                      <a14:imgEffect>
-                        <a14:backgroundRemoval t="37895" b="61185" l="14390" r="40073">
-                          <a14:backgroundMark x1="16324" y1="41333" x2="15341" y2="42417"/>
-                        </a14:backgroundRemoval>
-                      </a14:imgEffect>
-                    </a14:imgLayer>
-                  </a14:imgProps>
-                </a:ext>
-                <a:ext uri="{28A0092B-C50C-407E-A947-70E740481C1C}">
-                  <a14:useLocalDpi xmlns:a14="http://schemas.microsoft.com/office/drawing/2010/main" val="0"/>
-                </a:ext>
-              </a:extLst>
-            </a:blip>
-            <a:srcRect l="11180" t="34984" r="56716" b="35904"/>
-            <a:stretch/>
-          </p:blipFill>
-          <p:spPr bwMode="auto">
-            <a:xfrm>
-              <a:off x="8290495" y="1367779"/>
-              <a:ext cx="2675890" cy="1362075"/>
-            </a:xfrm>
-            <a:prstGeom prst="rect">
-              <a:avLst/>
-            </a:prstGeom>
-            <a:noFill/>
-            <a:ln>
-              <a:noFill/>
-            </a:ln>
-            <a:extLst>
-              <a:ext uri="{53640926-AAD7-44D8-BBD7-CCE9431645EC}">
-                <a14:shadowObscured xmlns:a14="http://schemas.microsoft.com/office/drawing/2010/main"/>
-              </a:ext>
-            </a:extLst>
-          </p:spPr>
-        </p:pic>
-      </p:grpSp>
-      <p:grpSp>
-        <p:nvGrpSpPr>
-          <p:cNvPr id="9" name="그룹 8">
-            <a:extLst>
-              <a:ext uri="{FF2B5EF4-FFF2-40B4-BE49-F238E27FC236}">
-                <a16:creationId xmlns:a16="http://schemas.microsoft.com/office/drawing/2014/main" id="{41B3FD36-8CDE-A51E-0790-D143433A5753}"/>
-              </a:ext>
-            </a:extLst>
-          </p:cNvPr>
-          <p:cNvGrpSpPr/>
-          <p:nvPr/>
-        </p:nvGrpSpPr>
-        <p:grpSpPr>
-          <a:xfrm>
-            <a:off x="2464800" y="2758322"/>
+            <a:off x="3639600" y="2205688"/>
             <a:ext cx="3077018" cy="776499"/>
             <a:chOff x="4572000" y="1662545"/>
             <a:chExt cx="3001818" cy="776499"/>
@@ -3974,7 +3737,7 @@
         </p:nvGrpSpPr>
         <p:grpSpPr>
           <a:xfrm>
-            <a:off x="5637956" y="2517728"/>
+            <a:off x="6812756" y="1965094"/>
             <a:ext cx="2224223" cy="1122309"/>
             <a:chOff x="8290495" y="1367779"/>
             <a:chExt cx="2675890" cy="1362075"/>
@@ -4094,243 +3857,6 @@
           </p:spPr>
         </p:pic>
       </p:grpSp>
-      <p:grpSp>
-        <p:nvGrpSpPr>
-          <p:cNvPr id="30" name="그룹 29">
-            <a:extLst>
-              <a:ext uri="{FF2B5EF4-FFF2-40B4-BE49-F238E27FC236}">
-                <a16:creationId xmlns:a16="http://schemas.microsoft.com/office/drawing/2014/main" id="{72211819-BB15-70A8-99F4-08831079C313}"/>
-              </a:ext>
-            </a:extLst>
-          </p:cNvPr>
-          <p:cNvGrpSpPr/>
-          <p:nvPr/>
-        </p:nvGrpSpPr>
-        <p:grpSpPr>
-          <a:xfrm>
-            <a:off x="2464799" y="3643065"/>
-            <a:ext cx="1867055" cy="776499"/>
-            <a:chOff x="4572000" y="1662545"/>
-            <a:chExt cx="3001818" cy="776499"/>
-          </a:xfrm>
-        </p:grpSpPr>
-        <p:sp>
-          <p:nvSpPr>
-            <p:cNvPr id="32" name="순서도: 처리 31">
-              <a:extLst>
-                <a:ext uri="{FF2B5EF4-FFF2-40B4-BE49-F238E27FC236}">
-                  <a16:creationId xmlns:a16="http://schemas.microsoft.com/office/drawing/2014/main" id="{CD543464-47B5-F50B-C556-2FC66FF5051C}"/>
-                </a:ext>
-              </a:extLst>
-            </p:cNvPr>
-            <p:cNvSpPr/>
-            <p:nvPr/>
-          </p:nvSpPr>
-          <p:spPr>
-            <a:xfrm>
-              <a:off x="4572000" y="1662545"/>
-              <a:ext cx="3001818" cy="629669"/>
-            </a:xfrm>
-            <a:prstGeom prst="flowChartProcess">
-              <a:avLst/>
-            </a:prstGeom>
-          </p:spPr>
-          <p:style>
-            <a:lnRef idx="2">
-              <a:schemeClr val="accent1">
-                <a:shade val="15000"/>
-              </a:schemeClr>
-            </a:lnRef>
-            <a:fillRef idx="1">
-              <a:schemeClr val="accent1"/>
-            </a:fillRef>
-            <a:effectRef idx="0">
-              <a:schemeClr val="accent1"/>
-            </a:effectRef>
-            <a:fontRef idx="minor">
-              <a:schemeClr val="lt1"/>
-            </a:fontRef>
-          </p:style>
-          <p:txBody>
-            <a:bodyPr rtlCol="0" anchor="ctr"/>
-            <a:lstStyle/>
-            <a:p>
-              <a:pPr algn="ctr"/>
-              <a:endParaRPr lang="ko-KR" altLang="en-US"/>
-            </a:p>
-          </p:txBody>
-        </p:sp>
-        <p:sp>
-          <p:nvSpPr>
-            <p:cNvPr id="33" name="TextBox 32">
-              <a:extLst>
-                <a:ext uri="{FF2B5EF4-FFF2-40B4-BE49-F238E27FC236}">
-                  <a16:creationId xmlns:a16="http://schemas.microsoft.com/office/drawing/2014/main" id="{119263AA-60F1-73FC-F55C-2503FAB8DA55}"/>
-                </a:ext>
-              </a:extLst>
-            </p:cNvPr>
-            <p:cNvSpPr txBox="1"/>
-            <p:nvPr/>
-          </p:nvSpPr>
-          <p:spPr>
-            <a:xfrm>
-              <a:off x="4723939" y="1792713"/>
-              <a:ext cx="2752436" cy="646331"/>
-            </a:xfrm>
-            <a:prstGeom prst="rect">
-              <a:avLst/>
-            </a:prstGeom>
-            <a:noFill/>
-          </p:spPr>
-          <p:txBody>
-            <a:bodyPr wrap="square" rtlCol="0">
-              <a:spAutoFit/>
-            </a:bodyPr>
-            <a:lstStyle/>
-            <a:p>
-              <a:pPr algn="ctr"/>
-              <a:r>
-                <a:rPr lang="ko-KR" altLang="en-US"/>
-                <a:t>자동저장 빈도</a:t>
-              </a:r>
-            </a:p>
-          </p:txBody>
-        </p:sp>
-      </p:grpSp>
-      <p:grpSp>
-        <p:nvGrpSpPr>
-          <p:cNvPr id="34" name="그룹 33">
-            <a:extLst>
-              <a:ext uri="{FF2B5EF4-FFF2-40B4-BE49-F238E27FC236}">
-                <a16:creationId xmlns:a16="http://schemas.microsoft.com/office/drawing/2014/main" id="{9469FFC2-477D-E23B-6F23-EFA81AAE6C0A}"/>
-              </a:ext>
-            </a:extLst>
-          </p:cNvPr>
-          <p:cNvGrpSpPr/>
-          <p:nvPr/>
-        </p:nvGrpSpPr>
-        <p:grpSpPr>
-          <a:xfrm>
-            <a:off x="4271247" y="3409014"/>
-            <a:ext cx="2224223" cy="1122309"/>
-            <a:chOff x="8290495" y="1367779"/>
-            <a:chExt cx="2675890" cy="1362075"/>
-          </a:xfrm>
-        </p:grpSpPr>
-        <p:sp>
-          <p:nvSpPr>
-            <p:cNvPr id="35" name="사각형: 둥근 모서리 34">
-              <a:extLst>
-                <a:ext uri="{FF2B5EF4-FFF2-40B4-BE49-F238E27FC236}">
-                  <a16:creationId xmlns:a16="http://schemas.microsoft.com/office/drawing/2014/main" id="{A5498A91-5901-A5CE-A10E-C458A17E3D5D}"/>
-                </a:ext>
-              </a:extLst>
-            </p:cNvPr>
-            <p:cNvSpPr/>
-            <p:nvPr/>
-          </p:nvSpPr>
-          <p:spPr>
-            <a:xfrm>
-              <a:off x="8549031" y="1549413"/>
-              <a:ext cx="2103401" cy="1053438"/>
-            </a:xfrm>
-            <a:prstGeom prst="roundRect">
-              <a:avLst>
-                <a:gd name="adj" fmla="val 31572"/>
-              </a:avLst>
-            </a:prstGeom>
-            <a:solidFill>
-              <a:schemeClr val="bg1">
-                <a:lumMod val="85000"/>
-              </a:schemeClr>
-            </a:solidFill>
-            <a:ln>
-              <a:solidFill>
-                <a:schemeClr val="tx1"/>
-              </a:solidFill>
-            </a:ln>
-          </p:spPr>
-          <p:style>
-            <a:lnRef idx="2">
-              <a:schemeClr val="accent1">
-                <a:shade val="15000"/>
-              </a:schemeClr>
-            </a:lnRef>
-            <a:fillRef idx="1">
-              <a:schemeClr val="accent1"/>
-            </a:fillRef>
-            <a:effectRef idx="0">
-              <a:schemeClr val="accent1"/>
-            </a:effectRef>
-            <a:fontRef idx="minor">
-              <a:schemeClr val="lt1"/>
-            </a:fontRef>
-          </p:style>
-          <p:txBody>
-            <a:bodyPr rtlCol="0" anchor="ctr"/>
-            <a:lstStyle/>
-            <a:p>
-              <a:pPr algn="ctr"/>
-              <a:endParaRPr lang="ko-KR" altLang="en-US"/>
-            </a:p>
-          </p:txBody>
-        </p:sp>
-        <p:pic>
-          <p:nvPicPr>
-            <p:cNvPr id="36" name="그림 35" descr="Prototype an Input Stepper with Formula">
-              <a:extLst>
-                <a:ext uri="{FF2B5EF4-FFF2-40B4-BE49-F238E27FC236}">
-                  <a16:creationId xmlns:a16="http://schemas.microsoft.com/office/drawing/2014/main" id="{D0B711D3-F483-58D0-971F-C88FB0858B42}"/>
-                </a:ext>
-              </a:extLst>
-            </p:cNvPr>
-            <p:cNvPicPr>
-              <a:picLocks noChangeAspect="1"/>
-            </p:cNvPicPr>
-            <p:nvPr/>
-          </p:nvPicPr>
-          <p:blipFill rotWithShape="1">
-            <a:blip r:embed="rId4" cstate="print">
-              <a:extLst>
-                <a:ext uri="{BEBA8EAE-BF5A-486C-A8C5-ECC9F3942E4B}">
-                  <a14:imgProps xmlns:a14="http://schemas.microsoft.com/office/drawing/2010/main">
-                    <a14:imgLayer r:embed="rId5">
-                      <a14:imgEffect>
-                        <a14:backgroundRemoval t="37895" b="61185" l="14390" r="40073">
-                          <a14:backgroundMark x1="16324" y1="41333" x2="15341" y2="42417"/>
-                        </a14:backgroundRemoval>
-                      </a14:imgEffect>
-                    </a14:imgLayer>
-                  </a14:imgProps>
-                </a:ext>
-                <a:ext uri="{28A0092B-C50C-407E-A947-70E740481C1C}">
-                  <a14:useLocalDpi xmlns:a14="http://schemas.microsoft.com/office/drawing/2010/main" val="0"/>
-                </a:ext>
-              </a:extLst>
-            </a:blip>
-            <a:srcRect l="11180" t="34984" r="56716" b="35904"/>
-            <a:stretch/>
-          </p:blipFill>
-          <p:spPr bwMode="auto">
-            <a:xfrm>
-              <a:off x="8290495" y="1367779"/>
-              <a:ext cx="2675890" cy="1362075"/>
-            </a:xfrm>
-            <a:prstGeom prst="rect">
-              <a:avLst/>
-            </a:prstGeom>
-            <a:noFill/>
-            <a:ln>
-              <a:noFill/>
-            </a:ln>
-            <a:extLst>
-              <a:ext uri="{53640926-AAD7-44D8-BBD7-CCE9431645EC}">
-                <a14:shadowObscured xmlns:a14="http://schemas.microsoft.com/office/drawing/2010/main"/>
-              </a:ext>
-            </a:extLst>
-          </p:spPr>
-        </p:pic>
-      </p:grpSp>
       <p:pic>
         <p:nvPicPr>
           <p:cNvPr id="37" name="그림 36" descr="Toggle button design: the full run through - Justinmind">
@@ -4358,7 +3884,7 @@
         </p:blipFill>
         <p:spPr bwMode="auto">
           <a:xfrm>
-            <a:off x="4204444" y="5263571"/>
+            <a:off x="5379244" y="3824248"/>
             <a:ext cx="1433512" cy="914400"/>
           </a:xfrm>
           <a:prstGeom prst="rect">
@@ -4389,7 +3915,7 @@
         </p:nvGrpSpPr>
         <p:grpSpPr>
           <a:xfrm>
-            <a:off x="2439075" y="5405937"/>
+            <a:off x="3613875" y="3966614"/>
             <a:ext cx="1625602" cy="629669"/>
             <a:chOff x="4572000" y="1662545"/>
             <a:chExt cx="3001818" cy="629669"/>
@@ -4492,8 +4018,8 @@
         </p:nvSpPr>
         <p:spPr>
           <a:xfrm>
-            <a:off x="1306775" y="1025236"/>
-            <a:ext cx="1196280" cy="5006109"/>
+            <a:off x="2481575" y="1356834"/>
+            <a:ext cx="1196280" cy="3235188"/>
           </a:xfrm>
           <a:custGeom>
             <a:avLst/>
@@ -4593,7 +4119,7 @@
         </p:nvSpPr>
         <p:spPr>
           <a:xfrm>
-            <a:off x="850637" y="3173109"/>
+            <a:off x="1871037" y="2611581"/>
             <a:ext cx="738909" cy="720437"/>
           </a:xfrm>
           <a:prstGeom prst="ellipse">
